--- a/Agent-Evaluation-AWS.pptx
+++ b/Agent-Evaluation-AWS.pptx
@@ -325,83 +325,43 @@
           <a:p>
             <a:r>
               <a:rPr lang="en-US" dirty="0" smtClean="0"/>
-              <a:t> </a:t>
-            </a:r>
+              <a:t> He comes back and says 'Done! I connected it to the RDS.' </a:t>
+            </a:r>
+          </a:p>
+          <a:p>
             <a:r>
               <a:rPr lang="en-US" dirty="0" smtClean="0"/>
-              <a:t>He comes back and says 'Done! I connected it to the RDS.' </a:t>
-            </a:r>
-            <a:endParaRPr lang="en-US" dirty="0" smtClean="0"/>
+              <a:t>But you later check - he didn't even read the file that tells him where the real database is. </a:t>
+            </a:r>
           </a:p>
           <a:p>
             <a:r>
               <a:rPr lang="en-US" dirty="0" smtClean="0"/>
-              <a:t>But </a:t>
-            </a:r>
+              <a:t>He just invented the location in his head.</a:t>
+            </a:r>
+          </a:p>
+          <a:p>
             <a:r>
               <a:rPr lang="en-US" dirty="0" smtClean="0"/>
-              <a:t>you later check - he didn't even read the file that tells him where the real database is. </a:t>
-            </a:r>
-            <a:endParaRPr lang="en-US" dirty="0" smtClean="0"/>
+              <a:t>The app worked in the test, but on a real day, it will fail.</a:t>
+            </a:r>
           </a:p>
           <a:p>
             <a:r>
               <a:rPr lang="en-US" dirty="0" smtClean="0"/>
-              <a:t>He </a:t>
-            </a:r>
+              <a:t> This is what AI agents do too. </a:t>
+            </a:r>
+          </a:p>
+          <a:p>
             <a:r>
               <a:rPr lang="en-US" dirty="0" smtClean="0"/>
-              <a:t>just invented the location in his head</a:t>
-            </a:r>
+              <a:t>They can give you the right answer using the wrong steps. </a:t>
+            </a:r>
+          </a:p>
+          <a:p>
             <a:r>
               <a:rPr lang="en-US" dirty="0" smtClean="0"/>
-              <a:t>.</a:t>
-            </a:r>
-          </a:p>
-          <a:p>
-            <a:r>
-              <a:rPr lang="en-US" dirty="0" smtClean="0"/>
-              <a:t>The </a:t>
-            </a:r>
-            <a:r>
-              <a:rPr lang="en-US" dirty="0" smtClean="0"/>
-              <a:t>app worked in the test, but on a real day, it will fail</a:t>
-            </a:r>
-            <a:r>
-              <a:rPr lang="en-US" dirty="0" smtClean="0"/>
-              <a:t>.</a:t>
-            </a:r>
-          </a:p>
-          <a:p>
-            <a:r>
-              <a:rPr lang="en-US" dirty="0" smtClean="0"/>
-              <a:t> </a:t>
-            </a:r>
-            <a:r>
-              <a:rPr lang="en-US" dirty="0" smtClean="0"/>
-              <a:t>This is what AI agents do too. </a:t>
-            </a:r>
-            <a:endParaRPr lang="en-US" dirty="0" smtClean="0"/>
-          </a:p>
-          <a:p>
-            <a:r>
-              <a:rPr lang="en-US" dirty="0" smtClean="0"/>
-              <a:t>They </a:t>
-            </a:r>
-            <a:r>
-              <a:rPr lang="en-US" dirty="0" smtClean="0"/>
-              <a:t>can give you the right answer using the wrong steps. </a:t>
-            </a:r>
-            <a:endParaRPr lang="en-US" dirty="0" smtClean="0"/>
-          </a:p>
-          <a:p>
-            <a:r>
-              <a:rPr lang="en-US" dirty="0" smtClean="0"/>
-              <a:t>If </a:t>
-            </a:r>
-            <a:r>
-              <a:rPr lang="en-US" dirty="0" smtClean="0"/>
-              <a:t>we don't evaluate, we will think it works until it breaks in production."</a:t>
+              <a:t>If we don't evaluate, we will think it works until it breaks in production."</a:t>
             </a:r>
             <a:endParaRPr lang="en-US" dirty="0"/>
           </a:p>
@@ -586,52 +546,29 @@
               <a:rPr lang="en-US" dirty="0" smtClean="0"/>
               <a:t> to Accra Mall: </a:t>
             </a:r>
-            <a:endParaRPr lang="en-US" dirty="0" smtClean="0"/>
           </a:p>
           <a:p>
             <a:r>
               <a:rPr lang="en-US" dirty="0" smtClean="0"/>
-              <a:t>Right </a:t>
-            </a:r>
+              <a:t>Right order? </a:t>
+            </a:r>
+          </a:p>
+          <a:p>
             <a:r>
               <a:rPr lang="en-US" dirty="0" smtClean="0"/>
-              <a:t>order? </a:t>
-            </a:r>
-            <a:endParaRPr lang="en-US" dirty="0" smtClean="0"/>
+              <a:t>Did he listen to map or ignore roadblock?</a:t>
+            </a:r>
           </a:p>
           <a:p>
             <a:r>
               <a:rPr lang="en-US" dirty="0" smtClean="0"/>
-              <a:t>Did </a:t>
-            </a:r>
+              <a:t> Valid payment? </a:t>
+            </a:r>
+          </a:p>
+          <a:p>
             <a:r>
               <a:rPr lang="en-US" dirty="0" smtClean="0"/>
-              <a:t>he listen to map or ignore roadblock</a:t>
-            </a:r>
-            <a:r>
-              <a:rPr lang="en-US" dirty="0" smtClean="0"/>
-              <a:t>?</a:t>
-            </a:r>
-          </a:p>
-          <a:p>
-            <a:r>
-              <a:rPr lang="en-US" dirty="0" smtClean="0"/>
-              <a:t> </a:t>
-            </a:r>
-            <a:r>
-              <a:rPr lang="en-US" dirty="0" smtClean="0"/>
-              <a:t>Valid payment? </a:t>
-            </a:r>
-            <a:endParaRPr lang="en-US" dirty="0" smtClean="0"/>
-          </a:p>
-          <a:p>
-            <a:r>
-              <a:rPr lang="en-US" dirty="0" smtClean="0"/>
-              <a:t>Did </a:t>
-            </a:r>
-            <a:r>
-              <a:rPr lang="en-US" dirty="0" smtClean="0"/>
-              <a:t>he invent stories?</a:t>
+              <a:t>Did he invent stories?</a:t>
             </a:r>
             <a:endParaRPr lang="en-US" dirty="0"/>
           </a:p>
@@ -896,49 +833,29 @@
               <a:rPr lang="en-US" dirty="0" smtClean="0"/>
               <a:t>Like delivery bike: </a:t>
             </a:r>
-            <a:endParaRPr lang="en-US" dirty="0" smtClean="0"/>
           </a:p>
           <a:p>
             <a:r>
               <a:rPr lang="en-US" dirty="0" smtClean="0"/>
-              <a:t>Latency </a:t>
-            </a:r>
+              <a:t>Latency - order to delivery (&lt;10s). </a:t>
+            </a:r>
+          </a:p>
+          <a:p>
             <a:r>
               <a:rPr lang="en-US" dirty="0" smtClean="0"/>
-              <a:t>- order to delivery (&lt;10s). </a:t>
-            </a:r>
-            <a:endParaRPr lang="en-US" dirty="0" smtClean="0"/>
+              <a:t>Cost - data per trip (alert +20%). </a:t>
+            </a:r>
           </a:p>
           <a:p>
             <a:r>
               <a:rPr lang="en-US" dirty="0" smtClean="0"/>
-              <a:t>Cost </a:t>
-            </a:r>
+              <a:t>Tool calls - how many calls for help? (&lt;8). </a:t>
+            </a:r>
+          </a:p>
+          <a:p>
             <a:r>
               <a:rPr lang="en-US" dirty="0" smtClean="0"/>
-              <a:t>- data per trip (alert +20%). </a:t>
-            </a:r>
-            <a:endParaRPr lang="en-US" dirty="0" smtClean="0"/>
-          </a:p>
-          <a:p>
-            <a:r>
-              <a:rPr lang="en-US" dirty="0" smtClean="0"/>
-              <a:t>Tool </a:t>
-            </a:r>
-            <a:r>
-              <a:rPr lang="en-US" dirty="0" smtClean="0"/>
-              <a:t>calls - how many calls for help? (&lt;8). </a:t>
-            </a:r>
-            <a:endParaRPr lang="en-US" dirty="0" smtClean="0"/>
-          </a:p>
-          <a:p>
-            <a:r>
-              <a:rPr lang="en-US" dirty="0" smtClean="0"/>
-              <a:t>Loops </a:t>
-            </a:r>
-            <a:r>
-              <a:rPr lang="en-US" dirty="0" smtClean="0"/>
-              <a:t>- stuck like </a:t>
+              <a:t>Loops - stuck like </a:t>
             </a:r>
             <a:r>
               <a:rPr lang="en-US" dirty="0" err="1" smtClean="0"/>
@@ -1683,11 +1600,7 @@
           <a:p>
             <a:r>
               <a:rPr lang="en-US" dirty="0" smtClean="0"/>
-              <a:t>A router doesn't need a full reasoning loop — a single classification call is enough. The confidence score is what makes it safe</a:t>
-            </a:r>
-            <a:r>
-              <a:rPr lang="en-US" dirty="0" smtClean="0"/>
-              <a:t>.</a:t>
+              <a:t>A router doesn't need a full reasoning loop — a single classification call is enough. The confidence score is what makes it safe.</a:t>
             </a:r>
           </a:p>
           <a:p>
@@ -2957,36 +2870,19 @@
           <a:p>
             <a:r>
               <a:rPr lang="en-US" dirty="0" smtClean="0"/>
-              <a:t> </a:t>
-            </a:r>
+              <a:t> There are 13 different jobs - plumbing, wiring, painting, security.</a:t>
+            </a:r>
+          </a:p>
+          <a:p>
             <a:r>
               <a:rPr lang="en-US" dirty="0" smtClean="0"/>
-              <a:t>There are 13 different jobs - plumbing, wiring, painting, security</a:t>
-            </a:r>
+              <a:t> Today we are focusing on only 2: The brain of the agent, and how we test if that brain is good. </a:t>
+            </a:r>
+          </a:p>
+          <a:p>
             <a:r>
               <a:rPr lang="en-US" dirty="0" smtClean="0"/>
-              <a:t>.</a:t>
-            </a:r>
-          </a:p>
-          <a:p>
-            <a:r>
-              <a:rPr lang="en-US" dirty="0" smtClean="0"/>
-              <a:t> </a:t>
-            </a:r>
-            <a:r>
-              <a:rPr lang="en-US" dirty="0" smtClean="0"/>
-              <a:t>Today we are focusing on only 2: The brain of the agent, and how we test if that brain is good. </a:t>
-            </a:r>
-            <a:endParaRPr lang="en-US" dirty="0" smtClean="0"/>
-          </a:p>
-          <a:p>
-            <a:r>
-              <a:rPr lang="en-US" dirty="0" smtClean="0"/>
-              <a:t>We </a:t>
-            </a:r>
-            <a:r>
-              <a:rPr lang="en-US" dirty="0" smtClean="0"/>
-              <a:t>are in the Evaluation part, but we will also touch on Routing - meaning how the agent decides which expert to call."</a:t>
+              <a:t>We are in the Evaluation part, but we will also touch on Routing - meaning how the agent decides which expert to call."</a:t>
             </a:r>
             <a:endParaRPr lang="en-US" dirty="0"/>
           </a:p>
@@ -3076,7 +2972,6 @@
               <a:rPr lang="en-US" dirty="0" smtClean="0"/>
               <a:t>Like WASSCE: </a:t>
             </a:r>
-            <a:endParaRPr lang="en-US" dirty="0" smtClean="0"/>
           </a:p>
           <a:p>
             <a:pPr marL="228600" indent="-228600">
@@ -3084,15 +2979,7 @@
             </a:pPr>
             <a:r>
               <a:rPr lang="en-US" dirty="0" smtClean="0"/>
-              <a:t>Did </a:t>
-            </a:r>
-            <a:r>
-              <a:rPr lang="en-US" dirty="0" smtClean="0"/>
-              <a:t>it deliver</a:t>
-            </a:r>
-            <a:r>
-              <a:rPr lang="en-US" dirty="0" smtClean="0"/>
-              <a:t>?</a:t>
+              <a:t>Did it deliver?</a:t>
             </a:r>
           </a:p>
           <a:p>
@@ -3101,13 +2988,8 @@
             </a:pPr>
             <a:r>
               <a:rPr lang="en-US" dirty="0" smtClean="0"/>
-              <a:t>Did </a:t>
-            </a:r>
-            <a:r>
-              <a:rPr lang="en-US" dirty="0" smtClean="0"/>
-              <a:t>it think well or guess? </a:t>
-            </a:r>
-            <a:endParaRPr lang="en-US" dirty="0" smtClean="0"/>
+              <a:t>Did it think well or guess? </a:t>
+            </a:r>
           </a:p>
           <a:p>
             <a:pPr marL="228600" indent="-228600">
@@ -3115,13 +2997,8 @@
             </a:pPr>
             <a:r>
               <a:rPr lang="en-US" dirty="0" smtClean="0"/>
-              <a:t>Was </a:t>
-            </a:r>
-            <a:r>
-              <a:rPr lang="en-US" dirty="0" smtClean="0"/>
-              <a:t>it fast/cheap? </a:t>
-            </a:r>
-            <a:endParaRPr lang="en-US" dirty="0" smtClean="0"/>
+              <a:t>Was it fast/cheap? </a:t>
+            </a:r>
           </a:p>
           <a:p>
             <a:pPr marL="228600" indent="-228600">
@@ -3129,25 +3006,16 @@
             </a:pPr>
             <a:r>
               <a:rPr lang="en-US" dirty="0" smtClean="0"/>
-              <a:t>Was </a:t>
-            </a:r>
+              <a:t>Was it safe? </a:t>
+            </a:r>
+          </a:p>
+          <a:p>
+            <a:pPr marL="0" indent="0">
+              <a:buNone/>
+            </a:pPr>
             <a:r>
               <a:rPr lang="en-US" dirty="0" smtClean="0"/>
-              <a:t>it safe? </a:t>
-            </a:r>
-            <a:endParaRPr lang="en-US" dirty="0" smtClean="0"/>
-          </a:p>
-          <a:p>
-            <a:pPr marL="0" indent="0">
-              <a:buNone/>
-            </a:pPr>
-            <a:r>
-              <a:rPr lang="en-US" dirty="0" smtClean="0"/>
-              <a:t>Don't </a:t>
-            </a:r>
-            <a:r>
-              <a:rPr lang="en-US" dirty="0" smtClean="0"/>
-              <a:t>check only 1.</a:t>
+              <a:t>Don't check only 1.</a:t>
             </a:r>
             <a:endParaRPr lang="en-US" dirty="0"/>
           </a:p>
@@ -3243,21 +3111,13 @@
             </a:r>
             <a:r>
               <a:rPr lang="en-US" dirty="0" smtClean="0"/>
-              <a:t> reach Circle</a:t>
-            </a:r>
+              <a:t> reach Circle?“</a:t>
+            </a:r>
+          </a:p>
+          <a:p>
             <a:r>
               <a:rPr lang="en-US" dirty="0" smtClean="0"/>
-              <a:t>?“</a:t>
-            </a:r>
-          </a:p>
-          <a:p>
-            <a:r>
-              <a:rPr lang="en-US" dirty="0" smtClean="0"/>
-              <a:t> </a:t>
-            </a:r>
-            <a:r>
-              <a:rPr lang="en-US" dirty="0" smtClean="0"/>
-              <a:t>Partial like </a:t>
+              <a:t> Partial like </a:t>
             </a:r>
             <a:r>
               <a:rPr lang="en-US" dirty="0" err="1" smtClean="0"/>
@@ -3267,16 +3127,11 @@
               <a:rPr lang="en-US" dirty="0" smtClean="0"/>
               <a:t> competition. </a:t>
             </a:r>
-            <a:endParaRPr lang="en-US" dirty="0" smtClean="0"/>
           </a:p>
           <a:p>
             <a:r>
               <a:rPr lang="en-US" dirty="0" smtClean="0"/>
-              <a:t>And </a:t>
-            </a:r>
-            <a:r>
-              <a:rPr lang="en-US" dirty="0" smtClean="0"/>
-              <a:t>always do 10% human check - </a:t>
+              <a:t>And always do 10% human check - </a:t>
             </a:r>
             <a:r>
               <a:rPr lang="en-US" dirty="0" err="1" smtClean="0"/>
@@ -3286,16 +3141,11 @@
               <a:rPr lang="en-US" dirty="0" smtClean="0"/>
               <a:t> checking teacher's marking. </a:t>
             </a:r>
-            <a:endParaRPr lang="en-US" dirty="0" smtClean="0"/>
           </a:p>
           <a:p>
             <a:r>
               <a:rPr lang="en-US" dirty="0" smtClean="0"/>
-              <a:t>Tool</a:t>
-            </a:r>
-            <a:r>
-              <a:rPr lang="en-US" dirty="0" smtClean="0"/>
-              <a:t>: </a:t>
+              <a:t>Tool: </a:t>
             </a:r>
             <a:r>
               <a:rPr lang="en-US" dirty="0" err="1" smtClean="0"/>
@@ -3409,38 +3259,23 @@
               <a:rPr lang="en-US" dirty="0" smtClean="0"/>
               <a:t> slow network too. </a:t>
             </a:r>
-            <a:endParaRPr lang="en-US" dirty="0" smtClean="0"/>
           </a:p>
           <a:p>
             <a:r>
               <a:rPr lang="en-US" dirty="0" smtClean="0"/>
-              <a:t>You </a:t>
-            </a:r>
+              <a:t>You need: question, good answer, marking scheme. </a:t>
+            </a:r>
+          </a:p>
+          <a:p>
             <a:r>
               <a:rPr lang="en-US" dirty="0" smtClean="0"/>
-              <a:t>need: question, good answer, marking scheme. </a:t>
-            </a:r>
-            <a:endParaRPr lang="en-US" dirty="0" smtClean="0"/>
+              <a:t>Include 5 types: simple, hard, reading old code (like ECG wiring), confusing, security traps. </a:t>
+            </a:r>
           </a:p>
           <a:p>
             <a:r>
               <a:rPr lang="en-US" dirty="0" smtClean="0"/>
-              <a:t>Include </a:t>
-            </a:r>
-            <a:r>
-              <a:rPr lang="en-US" dirty="0" smtClean="0"/>
-              <a:t>5 types: simple, hard, reading old code (like ECG wiring), confusing, security traps. </a:t>
-            </a:r>
-            <a:endParaRPr lang="en-US" dirty="0" smtClean="0"/>
-          </a:p>
-          <a:p>
-            <a:r>
-              <a:rPr lang="en-US" dirty="0" smtClean="0"/>
-              <a:t>Start </a:t>
-            </a:r>
-            <a:r>
-              <a:rPr lang="en-US" dirty="0" smtClean="0"/>
-              <a:t>20-50 only, keep in S3.</a:t>
+              <a:t>Start 20-50 only, keep in S3.</a:t>
             </a:r>
             <a:endParaRPr lang="en-US" dirty="0"/>
           </a:p>
@@ -3615,21 +3450,13 @@
           <a:p>
             <a:r>
               <a:rPr lang="en-US" dirty="0" smtClean="0"/>
-              <a:t>I gave agent task: Add encryption to S3. It did it but added extra story not from tools. When I asked "is this good?" - marks scattered. When I asked specific - "did it add valid block? Is claim from tool?" - everyone agrees</a:t>
-            </a:r>
+              <a:t>I gave agent task: Add encryption to S3. It did it but added extra story not from tools. When I asked "is this good?" - marks scattered. When I asked specific - "did it add valid block? Is claim from tool?" - everyone agrees.</a:t>
+            </a:r>
+          </a:p>
+          <a:p>
             <a:r>
               <a:rPr lang="en-US" dirty="0" smtClean="0"/>
-              <a:t>.</a:t>
-            </a:r>
-          </a:p>
-          <a:p>
-            <a:r>
-              <a:rPr lang="en-US" dirty="0" smtClean="0"/>
-              <a:t> </a:t>
-            </a:r>
-            <a:r>
-              <a:rPr lang="en-US" dirty="0" smtClean="0"/>
-              <a:t>Lesson: Be specific. And never let Sonnet mark Sonnet - use Opus as teacher.</a:t>
+              <a:t> Lesson: Be specific. And never let Sonnet mark Sonnet - use Opus as teacher.</a:t>
             </a:r>
             <a:endParaRPr lang="en-US" dirty="0"/>
           </a:p>
@@ -23585,7 +23412,7 @@
       </p:sp>
       <p:pic>
         <p:nvPicPr>
-          <p:cNvPr id="4" name="Picture 3"/>
+          <p:cNvPr id="5" name="Picture 4"/>
           <p:cNvPicPr>
             <a:picLocks noChangeAspect="1"/>
           </p:cNvPicPr>
@@ -23599,8 +23426,8 @@
         </p:blipFill>
         <p:spPr>
           <a:xfrm>
-            <a:off x="6426041" y="984124"/>
-            <a:ext cx="3961606" cy="3971924"/>
+            <a:off x="7101006" y="1150934"/>
+            <a:ext cx="4431774" cy="4295710"/>
           </a:xfrm>
           <a:prstGeom prst="rect">
             <a:avLst/>

--- a/Agent-Evaluation-AWS.pptx
+++ b/Agent-Evaluation-AWS.pptx
@@ -15389,6 +15389,26 @@
             <a:pPr marL="0" indent="0">
               <a:buNone/>
             </a:pPr>
+            <a:r>
+              <a:rPr lang="en-US" sz="1700" b="1" dirty="0" smtClean="0">
+                <a:solidFill>
+                  <a:srgbClr val="FFFFFF"/>
+                </a:solidFill>
+                <a:latin typeface="Amazon Ember Display" pitchFamily="34" charset="0"/>
+                <a:ea typeface="Amazon Ember Display" pitchFamily="34" charset="-122"/>
+              </a:rPr>
+              <a:t>AWS  User </a:t>
+            </a:r>
+            <a:r>
+              <a:rPr lang="en-US" sz="1700" b="1" smtClean="0">
+                <a:solidFill>
+                  <a:srgbClr val="FFFFFF"/>
+                </a:solidFill>
+                <a:latin typeface="Amazon Ember Display" pitchFamily="34" charset="0"/>
+                <a:ea typeface="Amazon Ember Display" pitchFamily="34" charset="-122"/>
+              </a:rPr>
+              <a:t>Group Leader</a:t>
+            </a:r>
             <a:endParaRPr lang="en-US" sz="1700" b="1" dirty="0">
               <a:solidFill>
                 <a:srgbClr val="FFFFFF"/>
